--- a/privacy/paper_min-k/fig/overview.pptx
+++ b/privacy/paper_min-k/fig/overview.pptx
@@ -205,7 +205,7 @@
           <a:p>
             <a:fld id="{3B624B96-F7A0-634D-924D-D34EE602F0F5}" type="datetimeFigureOut">
               <a:rPr lang="en-US" smtClean="0"/>
-              <a:t>7/3/25</a:t>
+              <a:t>7/21/25</a:t>
             </a:fld>
             <a:endParaRPr lang="en-US"/>
           </a:p>
@@ -919,7 +919,7 @@
           <a:p>
             <a:fld id="{3DBCF0D1-8A85-2640-8DAD-57E451814062}" type="datetimeFigureOut">
               <a:rPr lang="en-US" smtClean="0"/>
-              <a:t>7/3/25</a:t>
+              <a:t>7/21/25</a:t>
             </a:fld>
             <a:endParaRPr lang="en-US"/>
           </a:p>
@@ -1084,7 +1084,7 @@
           <a:p>
             <a:fld id="{3DBCF0D1-8A85-2640-8DAD-57E451814062}" type="datetimeFigureOut">
               <a:rPr lang="en-US" smtClean="0"/>
-              <a:t>7/3/25</a:t>
+              <a:t>7/21/25</a:t>
             </a:fld>
             <a:endParaRPr lang="en-US"/>
           </a:p>
@@ -1259,7 +1259,7 @@
           <a:p>
             <a:fld id="{3DBCF0D1-8A85-2640-8DAD-57E451814062}" type="datetimeFigureOut">
               <a:rPr lang="en-US" smtClean="0"/>
-              <a:t>7/3/25</a:t>
+              <a:t>7/21/25</a:t>
             </a:fld>
             <a:endParaRPr lang="en-US"/>
           </a:p>
@@ -1424,7 +1424,7 @@
           <a:p>
             <a:fld id="{3DBCF0D1-8A85-2640-8DAD-57E451814062}" type="datetimeFigureOut">
               <a:rPr lang="en-US" smtClean="0"/>
-              <a:t>7/3/25</a:t>
+              <a:t>7/21/25</a:t>
             </a:fld>
             <a:endParaRPr lang="en-US"/>
           </a:p>
@@ -1665,7 +1665,7 @@
           <a:p>
             <a:fld id="{3DBCF0D1-8A85-2640-8DAD-57E451814062}" type="datetimeFigureOut">
               <a:rPr lang="en-US" smtClean="0"/>
-              <a:t>7/3/25</a:t>
+              <a:t>7/21/25</a:t>
             </a:fld>
             <a:endParaRPr lang="en-US"/>
           </a:p>
@@ -1892,7 +1892,7 @@
           <a:p>
             <a:fld id="{3DBCF0D1-8A85-2640-8DAD-57E451814062}" type="datetimeFigureOut">
               <a:rPr lang="en-US" smtClean="0"/>
-              <a:t>7/3/25</a:t>
+              <a:t>7/21/25</a:t>
             </a:fld>
             <a:endParaRPr lang="en-US"/>
           </a:p>
@@ -2254,7 +2254,7 @@
           <a:p>
             <a:fld id="{3DBCF0D1-8A85-2640-8DAD-57E451814062}" type="datetimeFigureOut">
               <a:rPr lang="en-US" smtClean="0"/>
-              <a:t>7/3/25</a:t>
+              <a:t>7/21/25</a:t>
             </a:fld>
             <a:endParaRPr lang="en-US"/>
           </a:p>
@@ -2367,7 +2367,7 @@
           <a:p>
             <a:fld id="{3DBCF0D1-8A85-2640-8DAD-57E451814062}" type="datetimeFigureOut">
               <a:rPr lang="en-US" smtClean="0"/>
-              <a:t>7/3/25</a:t>
+              <a:t>7/21/25</a:t>
             </a:fld>
             <a:endParaRPr lang="en-US"/>
           </a:p>
@@ -2457,7 +2457,7 @@
           <a:p>
             <a:fld id="{3DBCF0D1-8A85-2640-8DAD-57E451814062}" type="datetimeFigureOut">
               <a:rPr lang="en-US" smtClean="0"/>
-              <a:t>7/3/25</a:t>
+              <a:t>7/21/25</a:t>
             </a:fld>
             <a:endParaRPr lang="en-US"/>
           </a:p>
@@ -2729,7 +2729,7 @@
           <a:p>
             <a:fld id="{3DBCF0D1-8A85-2640-8DAD-57E451814062}" type="datetimeFigureOut">
               <a:rPr lang="en-US" smtClean="0"/>
-              <a:t>7/3/25</a:t>
+              <a:t>7/21/25</a:t>
             </a:fld>
             <a:endParaRPr lang="en-US"/>
           </a:p>
@@ -2981,7 +2981,7 @@
           <a:p>
             <a:fld id="{3DBCF0D1-8A85-2640-8DAD-57E451814062}" type="datetimeFigureOut">
               <a:rPr lang="en-US" smtClean="0"/>
-              <a:t>7/3/25</a:t>
+              <a:t>7/21/25</a:t>
             </a:fld>
             <a:endParaRPr lang="en-US"/>
           </a:p>
@@ -3189,7 +3189,7 @@
           <a:p>
             <a:fld id="{3DBCF0D1-8A85-2640-8DAD-57E451814062}" type="datetimeFigureOut">
               <a:rPr lang="en-US" smtClean="0"/>
-              <a:t>7/3/25</a:t>
+              <a:t>7/21/25</a:t>
             </a:fld>
             <a:endParaRPr lang="en-US"/>
           </a:p>
@@ -4078,7 +4078,7 @@
           <a:lstStyle/>
           <a:p>
             <a:pPr algn="ctr"/>
-            <a:endParaRPr lang="en-US">
+            <a:endParaRPr lang="en-US" sz="1400">
               <a:latin typeface="Trebuchet MS" panose="020B0703020202090204" pitchFamily="34" charset="0"/>
             </a:endParaRPr>
           </a:p>
@@ -10566,8 +10566,8 @@
         </p:nvSpPr>
         <p:spPr>
           <a:xfrm>
-            <a:off x="22309565" y="5873230"/>
-            <a:ext cx="243139" cy="230832"/>
+            <a:off x="22173153" y="5873230"/>
+            <a:ext cx="379551" cy="230832"/>
           </a:xfrm>
           <a:prstGeom prst="rect">
             <a:avLst/>
@@ -10675,8 +10675,8 @@
         </p:nvSpPr>
         <p:spPr>
           <a:xfrm>
-            <a:off x="22309565" y="6103506"/>
-            <a:ext cx="243139" cy="230832"/>
+            <a:off x="22173153" y="6103506"/>
+            <a:ext cx="379551" cy="230832"/>
           </a:xfrm>
           <a:prstGeom prst="rect">
             <a:avLst/>
@@ -10702,7 +10702,7 @@
                 </a:solidFill>
                 <a:latin typeface="Trebuchet MS" panose="020B0703020202090204" pitchFamily="34" charset="0"/>
               </a:rPr>
-              <a:t>(</a:t>
+              <a:t>name</a:t>
             </a:r>
           </a:p>
         </p:txBody>
@@ -10715,8 +10715,8 @@
         </p:nvSpPr>
         <p:spPr>
           <a:xfrm>
-            <a:off x="22309565" y="6333782"/>
-            <a:ext cx="243139" cy="230832"/>
+            <a:off x="22173153" y="6333782"/>
+            <a:ext cx="379551" cy="230832"/>
           </a:xfrm>
           <a:prstGeom prst="rect">
             <a:avLst/>
@@ -10742,7 +10742,7 @@
                 </a:solidFill>
                 <a:latin typeface="Trebuchet MS" panose="020B0703020202090204" pitchFamily="34" charset="0"/>
               </a:rPr>
-              <a:t>self</a:t>
+              <a:t>Id</a:t>
             </a:r>
           </a:p>
         </p:txBody>
@@ -10785,13 +10785,13 @@
           <a:p>
             <a:pPr algn="ctr"/>
             <a:r>
-              <a:rPr lang="en-US" sz="1200" dirty="0">
+              <a:rPr lang="en-US" sz="1000" dirty="0">
                 <a:solidFill>
                   <a:schemeClr val="tx1"/>
                 </a:solidFill>
                 <a:latin typeface="Trebuchet MS" panose="020B0703020202090204" pitchFamily="34" charset="0"/>
               </a:rPr>
-              <a:t>0.98</a:t>
+              <a:t>0.84</a:t>
             </a:r>
           </a:p>
         </p:txBody>
@@ -10834,13 +10834,13 @@
           <a:p>
             <a:pPr algn="ctr"/>
             <a:r>
-              <a:rPr lang="en-US" sz="1200" dirty="0">
+              <a:rPr lang="en-US" sz="1000" dirty="0">
                 <a:solidFill>
                   <a:schemeClr val="tx1"/>
                 </a:solidFill>
                 <a:latin typeface="Trebuchet MS" panose="020B0703020202090204" pitchFamily="34" charset="0"/>
               </a:rPr>
-              <a:t>0.30</a:t>
+              <a:t>0.04</a:t>
             </a:r>
           </a:p>
         </p:txBody>
@@ -10883,13 +10883,13 @@
           <a:p>
             <a:pPr algn="ctr"/>
             <a:r>
-              <a:rPr lang="en-US" sz="1200" dirty="0">
+              <a:rPr lang="en-US" sz="1000" dirty="0">
                 <a:solidFill>
                   <a:schemeClr val="tx1"/>
                 </a:solidFill>
                 <a:latin typeface="Trebuchet MS" panose="020B0703020202090204" pitchFamily="34" charset="0"/>
               </a:rPr>
-              <a:t>0.91</a:t>
+              <a:t>0.03</a:t>
             </a:r>
           </a:p>
         </p:txBody>

--- a/privacy/paper_min-k/fig/overview.pptx
+++ b/privacy/paper_min-k/fig/overview.pptx
@@ -3694,14 +3694,20 @@
       </p:grpSpPr>
       <p:sp>
         <p:nvSpPr>
-          <p:cNvPr id="603" name="Rounded Rectangle 602"/>
+          <p:cNvPr id="680" name="Rounded Rectangle 679">
+            <a:extLst>
+              <a:ext uri="{FF2B5EF4-FFF2-40B4-BE49-F238E27FC236}">
+                <a16:creationId xmlns:a16="http://schemas.microsoft.com/office/drawing/2014/main" id="{ECD0AAA4-06B1-6C75-12F2-F6B6B944C900}"/>
+              </a:ext>
+            </a:extLst>
+          </p:cNvPr>
           <p:cNvSpPr/>
           <p:nvPr/>
         </p:nvSpPr>
         <p:spPr>
           <a:xfrm>
-            <a:off x="16947667" y="7869393"/>
-            <a:ext cx="4164517" cy="377899"/>
+            <a:off x="16728378" y="3594289"/>
+            <a:ext cx="4593504" cy="4741690"/>
           </a:xfrm>
           <a:prstGeom prst="roundRect">
             <a:avLst>
@@ -3710,14 +3716,14 @@
           </a:prstGeom>
           <a:solidFill>
             <a:srgbClr val="7030A0">
-              <a:alpha val="14000"/>
+              <a:alpha val="3000"/>
             </a:srgbClr>
           </a:solidFill>
           <a:ln>
             <a:solidFill>
               <a:srgbClr val="7030A0"/>
             </a:solidFill>
-            <a:prstDash val="dash"/>
+            <a:prstDash val="solid"/>
           </a:ln>
         </p:spPr>
         <p:style>
@@ -3741,7 +3747,7 @@
           <a:lstStyle/>
           <a:p>
             <a:pPr algn="ctr"/>
-            <a:endParaRPr lang="en-US">
+            <a:endParaRPr lang="en-US" dirty="0">
               <a:latin typeface="Trebuchet MS" panose="020B0703020202090204" pitchFamily="34" charset="0"/>
             </a:endParaRPr>
           </a:p>
@@ -3749,14 +3755,14 @@
       </p:sp>
       <p:sp>
         <p:nvSpPr>
-          <p:cNvPr id="602" name="Rounded Rectangle 601"/>
+          <p:cNvPr id="603" name="Rounded Rectangle 602"/>
           <p:cNvSpPr/>
           <p:nvPr/>
         </p:nvSpPr>
         <p:spPr>
           <a:xfrm>
-            <a:off x="16947667" y="7077752"/>
-            <a:ext cx="4164517" cy="378000"/>
+            <a:off x="16947667" y="7869393"/>
+            <a:ext cx="4164517" cy="377899"/>
           </a:xfrm>
           <a:prstGeom prst="roundRect">
             <a:avLst>
@@ -3765,7 +3771,7 @@
           </a:prstGeom>
           <a:solidFill>
             <a:srgbClr val="7030A0">
-              <a:alpha val="13620"/>
+              <a:alpha val="14000"/>
             </a:srgbClr>
           </a:solidFill>
           <a:ln>
@@ -3804,14 +3810,14 @@
       </p:sp>
       <p:sp>
         <p:nvSpPr>
-          <p:cNvPr id="644" name="Rounded Rectangle 643"/>
+          <p:cNvPr id="602" name="Rounded Rectangle 601"/>
           <p:cNvSpPr/>
           <p:nvPr/>
         </p:nvSpPr>
         <p:spPr>
           <a:xfrm>
-            <a:off x="16823676" y="6765598"/>
-            <a:ext cx="4393854" cy="1560137"/>
+            <a:off x="16947667" y="7077752"/>
+            <a:ext cx="4164517" cy="378000"/>
           </a:xfrm>
           <a:prstGeom prst="roundRect">
             <a:avLst>
@@ -3820,14 +3826,14 @@
           </a:prstGeom>
           <a:solidFill>
             <a:srgbClr val="7030A0">
-              <a:alpha val="3000"/>
+              <a:alpha val="13620"/>
             </a:srgbClr>
           </a:solidFill>
           <a:ln>
             <a:solidFill>
               <a:srgbClr val="7030A0"/>
             </a:solidFill>
-            <a:prstDash val="solid"/>
+            <a:prstDash val="dash"/>
           </a:ln>
         </p:spPr>
         <p:style>
@@ -3851,7 +3857,7 @@
           <a:lstStyle/>
           <a:p>
             <a:pPr algn="ctr"/>
-            <a:endParaRPr lang="en-US" dirty="0">
+            <a:endParaRPr lang="en-US">
               <a:latin typeface="Trebuchet MS" panose="020B0703020202090204" pitchFamily="34" charset="0"/>
             </a:endParaRPr>
           </a:p>
@@ -3859,14 +3865,14 @@
       </p:sp>
       <p:sp>
         <p:nvSpPr>
-          <p:cNvPr id="642" name="Rounded Rectangle 641"/>
+          <p:cNvPr id="644" name="Rounded Rectangle 643"/>
           <p:cNvSpPr/>
           <p:nvPr/>
         </p:nvSpPr>
         <p:spPr>
           <a:xfrm>
-            <a:off x="11940367" y="3594290"/>
-            <a:ext cx="4393854" cy="4741694"/>
+            <a:off x="16823676" y="6765598"/>
+            <a:ext cx="4393854" cy="1560137"/>
           </a:xfrm>
           <a:prstGeom prst="roundRect">
             <a:avLst>
@@ -3906,7 +3912,7 @@
           <a:lstStyle/>
           <a:p>
             <a:pPr algn="ctr"/>
-            <a:endParaRPr lang="en-US">
+            <a:endParaRPr lang="en-US" dirty="0">
               <a:latin typeface="Trebuchet MS" panose="020B0703020202090204" pitchFamily="34" charset="0"/>
             </a:endParaRPr>
           </a:p>
@@ -3914,14 +3920,14 @@
       </p:sp>
       <p:sp>
         <p:nvSpPr>
-          <p:cNvPr id="23" name="Rounded Rectangle 22"/>
+          <p:cNvPr id="642" name="Rounded Rectangle 641"/>
           <p:cNvSpPr/>
           <p:nvPr/>
         </p:nvSpPr>
         <p:spPr>
           <a:xfrm>
-            <a:off x="391871" y="6355984"/>
-            <a:ext cx="10754570" cy="1980000"/>
+            <a:off x="11940367" y="3594290"/>
+            <a:ext cx="4393854" cy="4741694"/>
           </a:xfrm>
           <a:prstGeom prst="roundRect">
             <a:avLst>
@@ -3929,13 +3935,13 @@
             </a:avLst>
           </a:prstGeom>
           <a:solidFill>
-            <a:schemeClr val="bg1">
-              <a:lumMod val="95000"/>
-            </a:schemeClr>
+            <a:srgbClr val="7030A0">
+              <a:alpha val="3000"/>
+            </a:srgbClr>
           </a:solidFill>
           <a:ln>
             <a:solidFill>
-              <a:schemeClr val="tx1"/>
+              <a:srgbClr val="7030A0"/>
             </a:solidFill>
             <a:prstDash val="solid"/>
           </a:ln>
@@ -3969,14 +3975,14 @@
       </p:sp>
       <p:sp>
         <p:nvSpPr>
-          <p:cNvPr id="22" name="Rounded Rectangle 21"/>
+          <p:cNvPr id="23" name="Rounded Rectangle 22"/>
           <p:cNvSpPr/>
           <p:nvPr/>
         </p:nvSpPr>
         <p:spPr>
           <a:xfrm>
-            <a:off x="391870" y="3594290"/>
-            <a:ext cx="10735527" cy="1980000"/>
+            <a:off x="391871" y="6355984"/>
+            <a:ext cx="10754570" cy="1980000"/>
           </a:xfrm>
           <a:prstGeom prst="roundRect">
             <a:avLst>
@@ -4024,14 +4030,14 @@
       </p:sp>
       <p:sp>
         <p:nvSpPr>
-          <p:cNvPr id="749" name="Rounded Rectangle 748"/>
+          <p:cNvPr id="22" name="Rounded Rectangle 21"/>
           <p:cNvSpPr/>
           <p:nvPr/>
         </p:nvSpPr>
         <p:spPr>
           <a:xfrm>
-            <a:off x="12059998" y="5222989"/>
-            <a:ext cx="4156540" cy="1450048"/>
+            <a:off x="391870" y="3594290"/>
+            <a:ext cx="10735527" cy="1980000"/>
           </a:xfrm>
           <a:prstGeom prst="roundRect">
             <a:avLst>
@@ -4039,15 +4045,15 @@
             </a:avLst>
           </a:prstGeom>
           <a:solidFill>
-            <a:srgbClr val="7030A0">
-              <a:alpha val="14000"/>
-            </a:srgbClr>
+            <a:schemeClr val="bg1">
+              <a:lumMod val="95000"/>
+            </a:schemeClr>
           </a:solidFill>
           <a:ln>
             <a:solidFill>
-              <a:srgbClr val="7030A0"/>
-            </a:solidFill>
-            <a:prstDash val="dash"/>
+              <a:schemeClr val="tx1"/>
+            </a:solidFill>
+            <a:prstDash val="solid"/>
           </a:ln>
         </p:spPr>
         <p:style>
@@ -4071,6 +4077,61 @@
           <a:lstStyle/>
           <a:p>
             <a:pPr algn="ctr"/>
+            <a:endParaRPr lang="en-US">
+              <a:latin typeface="Trebuchet MS" panose="020B0703020202090204" pitchFamily="34" charset="0"/>
+            </a:endParaRPr>
+          </a:p>
+        </p:txBody>
+      </p:sp>
+      <p:sp>
+        <p:nvSpPr>
+          <p:cNvPr id="749" name="Rounded Rectangle 748"/>
+          <p:cNvSpPr/>
+          <p:nvPr/>
+        </p:nvSpPr>
+        <p:spPr>
+          <a:xfrm>
+            <a:off x="12059998" y="5222989"/>
+            <a:ext cx="4156540" cy="1450048"/>
+          </a:xfrm>
+          <a:prstGeom prst="roundRect">
+            <a:avLst>
+              <a:gd name="adj" fmla="val 2712"/>
+            </a:avLst>
+          </a:prstGeom>
+          <a:solidFill>
+            <a:srgbClr val="7030A0">
+              <a:alpha val="14000"/>
+            </a:srgbClr>
+          </a:solidFill>
+          <a:ln>
+            <a:solidFill>
+              <a:srgbClr val="7030A0"/>
+            </a:solidFill>
+            <a:prstDash val="dash"/>
+          </a:ln>
+        </p:spPr>
+        <p:style>
+          <a:lnRef idx="2">
+            <a:schemeClr val="accent1">
+              <a:shade val="15000"/>
+            </a:schemeClr>
+          </a:lnRef>
+          <a:fillRef idx="1">
+            <a:schemeClr val="accent1"/>
+          </a:fillRef>
+          <a:effectRef idx="0">
+            <a:schemeClr val="accent1"/>
+          </a:effectRef>
+          <a:fontRef idx="minor">
+            <a:schemeClr val="lt1"/>
+          </a:fontRef>
+        </p:style>
+        <p:txBody>
+          <a:bodyPr rtlCol="0" anchor="ctr"/>
+          <a:lstStyle/>
+          <a:p>
+            <a:pPr algn="ctr"/>
             <a:endParaRPr lang="en-US" sz="1400">
               <a:latin typeface="Trebuchet MS" panose="020B0703020202090204" pitchFamily="34" charset="0"/>
             </a:endParaRPr>
@@ -4407,37 +4468,6 @@
           </a:prstGeom>
         </p:spPr>
       </p:pic>
-      <p:sp>
-        <p:nvSpPr>
-          <p:cNvPr id="96" name="TextBox 95"/>
-          <p:cNvSpPr txBox="1"/>
-          <p:nvPr/>
-        </p:nvSpPr>
-        <p:spPr>
-          <a:xfrm>
-            <a:off x="12350505" y="5228533"/>
-            <a:ext cx="1778051" cy="261610"/>
-          </a:xfrm>
-          <a:prstGeom prst="rect">
-            <a:avLst/>
-          </a:prstGeom>
-          <a:noFill/>
-        </p:spPr>
-        <p:txBody>
-          <a:bodyPr wrap="none" rtlCol="0">
-            <a:spAutoFit/>
-          </a:bodyPr>
-          <a:lstStyle/>
-          <a:p>
-            <a:r>
-              <a:rPr lang="en-US" sz="1100" dirty="0">
-                <a:latin typeface="Trebuchet MS" panose="020B0703020202090204" pitchFamily="34" charset="0"/>
-              </a:rPr>
-              <a:t>Enumerating each tokens</a:t>
-            </a:r>
-          </a:p>
-        </p:txBody>
-      </p:sp>
       <p:cxnSp>
         <p:nvCxnSpPr>
           <p:cNvPr id="136" name="Straight Arrow Connector 135"/>
@@ -5906,7 +5936,7 @@
         </p:nvSpPr>
         <p:spPr>
           <a:xfrm>
-            <a:off x="11972403" y="5567618"/>
+            <a:off x="11972403" y="5480528"/>
             <a:ext cx="2099944" cy="230832"/>
           </a:xfrm>
           <a:prstGeom prst="rect">
@@ -6083,58 +6113,6 @@
               </a:rPr>
               <a:t>⌷in</a:t>
             </a:r>
-          </a:p>
-        </p:txBody>
-      </p:sp>
-      <p:sp>
-        <p:nvSpPr>
-          <p:cNvPr id="470" name="Arc 469"/>
-          <p:cNvSpPr>
-            <a:spLocks noChangeAspect="1"/>
-          </p:cNvSpPr>
-          <p:nvPr/>
-        </p:nvSpPr>
-        <p:spPr>
-          <a:xfrm rot="10800000">
-            <a:off x="12132451" y="5409722"/>
-            <a:ext cx="288000" cy="288000"/>
-          </a:xfrm>
-          <a:prstGeom prst="arc">
-            <a:avLst>
-              <a:gd name="adj1" fmla="val 16200000"/>
-              <a:gd name="adj2" fmla="val 10799994"/>
-            </a:avLst>
-          </a:prstGeom>
-          <a:ln w="12700">
-            <a:solidFill>
-              <a:schemeClr val="tx1"/>
-            </a:solidFill>
-            <a:headEnd type="none"/>
-            <a:tailEnd type="triangle"/>
-          </a:ln>
-        </p:spPr>
-        <p:style>
-          <a:lnRef idx="1">
-            <a:schemeClr val="accent1"/>
-          </a:lnRef>
-          <a:fillRef idx="0">
-            <a:schemeClr val="accent1"/>
-          </a:fillRef>
-          <a:effectRef idx="0">
-            <a:schemeClr val="accent1"/>
-          </a:effectRef>
-          <a:fontRef idx="minor">
-            <a:schemeClr val="tx1"/>
-          </a:fontRef>
-        </p:style>
-        <p:txBody>
-          <a:bodyPr rtlCol="0" anchor="ctr"/>
-          <a:lstStyle/>
-          <a:p>
-            <a:pPr algn="ctr"/>
-            <a:endParaRPr lang="en-US">
-              <a:latin typeface="Trebuchet MS" panose="020B0703020202090204" pitchFamily="34" charset="0"/>
-            </a:endParaRPr>
           </a:p>
         </p:txBody>
       </p:sp>
@@ -6367,7 +6345,7 @@
         </p:nvCxnSpPr>
         <p:spPr>
           <a:xfrm flipV="1">
-            <a:off x="13790141" y="5683034"/>
+            <a:off x="13790141" y="5622071"/>
             <a:ext cx="1440000" cy="0"/>
           </a:xfrm>
           <a:prstGeom prst="straightConnector1">
@@ -6403,7 +6381,7 @@
         </p:nvSpPr>
         <p:spPr>
           <a:xfrm>
-            <a:off x="13714678" y="5411754"/>
+            <a:off x="13714678" y="5350791"/>
             <a:ext cx="1587537" cy="261610"/>
           </a:xfrm>
           <a:prstGeom prst="rect">
@@ -10643,7 +10621,7 @@
         </p:nvSpPr>
         <p:spPr>
           <a:xfrm>
-            <a:off x="17652412" y="4191003"/>
+            <a:off x="18122312" y="4254503"/>
             <a:ext cx="2650122" cy="484828"/>
           </a:xfrm>
           <a:prstGeom prst="roundRect">
@@ -12338,7 +12316,7 @@
         </p:nvSpPr>
         <p:spPr>
           <a:xfrm>
-            <a:off x="14171427" y="6735158"/>
+            <a:off x="14171427" y="6743867"/>
             <a:ext cx="1584000" cy="369332"/>
           </a:xfrm>
           <a:prstGeom prst="rect">
@@ -12430,8 +12408,8 @@
         </p:nvSpPr>
         <p:spPr>
           <a:xfrm>
-            <a:off x="16956524" y="3735718"/>
-            <a:ext cx="4162839" cy="487630"/>
+            <a:off x="17323616" y="3735717"/>
+            <a:ext cx="3408643" cy="625369"/>
           </a:xfrm>
           <a:prstGeom prst="roundRect">
             <a:avLst/>
@@ -12471,7 +12449,7 @@
                 </a:solidFill>
                 <a:latin typeface="Trebuchet MS" panose="020B0703020202090204" pitchFamily="34" charset="0"/>
               </a:rPr>
-              <a:t>Syntax-Convention-based Pruning</a:t>
+              <a:t>Syntax-Convention-based Token Pruning</a:t>
             </a:r>
           </a:p>
         </p:txBody>
@@ -15314,67 +15292,6 @@
       </p:sp>
       <p:sp>
         <p:nvSpPr>
-          <p:cNvPr id="680" name="Rounded Rectangle 679">
-            <a:extLst>
-              <a:ext uri="{FF2B5EF4-FFF2-40B4-BE49-F238E27FC236}">
-                <a16:creationId xmlns:a16="http://schemas.microsoft.com/office/drawing/2014/main" id="{ECD0AAA4-06B1-6C75-12F2-F6B6B944C900}"/>
-              </a:ext>
-            </a:extLst>
-          </p:cNvPr>
-          <p:cNvSpPr/>
-          <p:nvPr/>
-        </p:nvSpPr>
-        <p:spPr>
-          <a:xfrm>
-            <a:off x="16728378" y="3594289"/>
-            <a:ext cx="4593504" cy="4741690"/>
-          </a:xfrm>
-          <a:prstGeom prst="roundRect">
-            <a:avLst>
-              <a:gd name="adj" fmla="val 2712"/>
-            </a:avLst>
-          </a:prstGeom>
-          <a:solidFill>
-            <a:srgbClr val="7030A0">
-              <a:alpha val="3000"/>
-            </a:srgbClr>
-          </a:solidFill>
-          <a:ln>
-            <a:solidFill>
-              <a:srgbClr val="7030A0"/>
-            </a:solidFill>
-            <a:prstDash val="solid"/>
-          </a:ln>
-        </p:spPr>
-        <p:style>
-          <a:lnRef idx="2">
-            <a:schemeClr val="accent1">
-              <a:shade val="15000"/>
-            </a:schemeClr>
-          </a:lnRef>
-          <a:fillRef idx="1">
-            <a:schemeClr val="accent1"/>
-          </a:fillRef>
-          <a:effectRef idx="0">
-            <a:schemeClr val="accent1"/>
-          </a:effectRef>
-          <a:fontRef idx="minor">
-            <a:schemeClr val="lt1"/>
-          </a:fontRef>
-        </p:style>
-        <p:txBody>
-          <a:bodyPr rtlCol="0" anchor="ctr"/>
-          <a:lstStyle/>
-          <a:p>
-            <a:pPr algn="ctr"/>
-            <a:endParaRPr lang="en-US">
-              <a:latin typeface="Trebuchet MS" panose="020B0703020202090204" pitchFamily="34" charset="0"/>
-            </a:endParaRPr>
-          </a:p>
-        </p:txBody>
-      </p:sp>
-      <p:sp>
-        <p:nvSpPr>
           <p:cNvPr id="681" name="TextBox 680">
             <a:extLst>
               <a:ext uri="{FF2B5EF4-FFF2-40B4-BE49-F238E27FC236}">
@@ -15539,10 +15456,10 @@
       </p:sp>
       <p:pic>
         <p:nvPicPr>
-          <p:cNvPr id="12" name="Picture 11">
+          <p:cNvPr id="25" name="Picture 24">
             <a:extLst>
               <a:ext uri="{FF2B5EF4-FFF2-40B4-BE49-F238E27FC236}">
-                <a16:creationId xmlns:a16="http://schemas.microsoft.com/office/drawing/2014/main" id="{354BF0C0-5AFE-52E5-FB09-1B9D9579F4A3}"/>
+                <a16:creationId xmlns:a16="http://schemas.microsoft.com/office/drawing/2014/main" id="{43E231B9-5269-A923-E3BF-302548940589}"/>
               </a:ext>
             </a:extLst>
           </p:cNvPr>
@@ -15559,8 +15476,8 @@
         </p:blipFill>
         <p:spPr>
           <a:xfrm>
-            <a:off x="22259881" y="6005083"/>
-            <a:ext cx="3936001" cy="830250"/>
+            <a:off x="22345647" y="5960913"/>
+            <a:ext cx="3683000" cy="952500"/>
           </a:xfrm>
           <a:prstGeom prst="rect">
             <a:avLst/>

--- a/privacy/paper_min-k/fig/overview.pptx
+++ b/privacy/paper_min-k/fig/overview.pptx
@@ -206,7 +206,7 @@
           <a:p>
             <a:fld id="{3B624B96-F7A0-634D-924D-D34EE602F0F5}" type="datetimeFigureOut">
               <a:rPr lang="en-US" smtClean="0"/>
-              <a:t>7/23/25</a:t>
+              <a:t>7/27/25</a:t>
             </a:fld>
             <a:endParaRPr lang="en-US"/>
           </a:p>
@@ -1022,7 +1022,7 @@
           <a:p>
             <a:fld id="{3DBCF0D1-8A85-2640-8DAD-57E451814062}" type="datetimeFigureOut">
               <a:rPr lang="en-US" smtClean="0"/>
-              <a:t>7/23/25</a:t>
+              <a:t>7/27/25</a:t>
             </a:fld>
             <a:endParaRPr lang="en-US"/>
           </a:p>
@@ -1187,7 +1187,7 @@
           <a:p>
             <a:fld id="{3DBCF0D1-8A85-2640-8DAD-57E451814062}" type="datetimeFigureOut">
               <a:rPr lang="en-US" smtClean="0"/>
-              <a:t>7/23/25</a:t>
+              <a:t>7/27/25</a:t>
             </a:fld>
             <a:endParaRPr lang="en-US"/>
           </a:p>
@@ -1362,7 +1362,7 @@
           <a:p>
             <a:fld id="{3DBCF0D1-8A85-2640-8DAD-57E451814062}" type="datetimeFigureOut">
               <a:rPr lang="en-US" smtClean="0"/>
-              <a:t>7/23/25</a:t>
+              <a:t>7/27/25</a:t>
             </a:fld>
             <a:endParaRPr lang="en-US"/>
           </a:p>
@@ -1527,7 +1527,7 @@
           <a:p>
             <a:fld id="{3DBCF0D1-8A85-2640-8DAD-57E451814062}" type="datetimeFigureOut">
               <a:rPr lang="en-US" smtClean="0"/>
-              <a:t>7/23/25</a:t>
+              <a:t>7/27/25</a:t>
             </a:fld>
             <a:endParaRPr lang="en-US"/>
           </a:p>
@@ -1768,7 +1768,7 @@
           <a:p>
             <a:fld id="{3DBCF0D1-8A85-2640-8DAD-57E451814062}" type="datetimeFigureOut">
               <a:rPr lang="en-US" smtClean="0"/>
-              <a:t>7/23/25</a:t>
+              <a:t>7/27/25</a:t>
             </a:fld>
             <a:endParaRPr lang="en-US"/>
           </a:p>
@@ -1995,7 +1995,7 @@
           <a:p>
             <a:fld id="{3DBCF0D1-8A85-2640-8DAD-57E451814062}" type="datetimeFigureOut">
               <a:rPr lang="en-US" smtClean="0"/>
-              <a:t>7/23/25</a:t>
+              <a:t>7/27/25</a:t>
             </a:fld>
             <a:endParaRPr lang="en-US"/>
           </a:p>
@@ -2357,7 +2357,7 @@
           <a:p>
             <a:fld id="{3DBCF0D1-8A85-2640-8DAD-57E451814062}" type="datetimeFigureOut">
               <a:rPr lang="en-US" smtClean="0"/>
-              <a:t>7/23/25</a:t>
+              <a:t>7/27/25</a:t>
             </a:fld>
             <a:endParaRPr lang="en-US"/>
           </a:p>
@@ -2470,7 +2470,7 @@
           <a:p>
             <a:fld id="{3DBCF0D1-8A85-2640-8DAD-57E451814062}" type="datetimeFigureOut">
               <a:rPr lang="en-US" smtClean="0"/>
-              <a:t>7/23/25</a:t>
+              <a:t>7/27/25</a:t>
             </a:fld>
             <a:endParaRPr lang="en-US"/>
           </a:p>
@@ -2560,7 +2560,7 @@
           <a:p>
             <a:fld id="{3DBCF0D1-8A85-2640-8DAD-57E451814062}" type="datetimeFigureOut">
               <a:rPr lang="en-US" smtClean="0"/>
-              <a:t>7/23/25</a:t>
+              <a:t>7/27/25</a:t>
             </a:fld>
             <a:endParaRPr lang="en-US"/>
           </a:p>
@@ -2832,7 +2832,7 @@
           <a:p>
             <a:fld id="{3DBCF0D1-8A85-2640-8DAD-57E451814062}" type="datetimeFigureOut">
               <a:rPr lang="en-US" smtClean="0"/>
-              <a:t>7/23/25</a:t>
+              <a:t>7/27/25</a:t>
             </a:fld>
             <a:endParaRPr lang="en-US"/>
           </a:p>
@@ -3084,7 +3084,7 @@
           <a:p>
             <a:fld id="{3DBCF0D1-8A85-2640-8DAD-57E451814062}" type="datetimeFigureOut">
               <a:rPr lang="en-US" smtClean="0"/>
-              <a:t>7/23/25</a:t>
+              <a:t>7/27/25</a:t>
             </a:fld>
             <a:endParaRPr lang="en-US"/>
           </a:p>
@@ -3292,7 +3292,7 @@
           <a:p>
             <a:fld id="{3DBCF0D1-8A85-2640-8DAD-57E451814062}" type="datetimeFigureOut">
               <a:rPr lang="en-US" smtClean="0"/>
-              <a:t>7/23/25</a:t>
+              <a:t>7/27/25</a:t>
             </a:fld>
             <a:endParaRPr lang="en-US"/>
           </a:p>
@@ -15476,8 +15476,38 @@
         </p:blipFill>
         <p:spPr>
           <a:xfrm>
-            <a:off x="22345647" y="5960913"/>
+            <a:off x="22339960" y="5864430"/>
             <a:ext cx="3683000" cy="952500"/>
+          </a:xfrm>
+          <a:prstGeom prst="rect">
+            <a:avLst/>
+          </a:prstGeom>
+        </p:spPr>
+      </p:pic>
+      <p:pic>
+        <p:nvPicPr>
+          <p:cNvPr id="6" name="Picture 5">
+            <a:extLst>
+              <a:ext uri="{FF2B5EF4-FFF2-40B4-BE49-F238E27FC236}">
+                <a16:creationId xmlns:a16="http://schemas.microsoft.com/office/drawing/2014/main" id="{1F37924E-93B8-52CB-3ACB-2F80A3036C48}"/>
+              </a:ext>
+            </a:extLst>
+          </p:cNvPr>
+          <p:cNvPicPr>
+            <a:picLocks noChangeAspect="1"/>
+          </p:cNvPicPr>
+          <p:nvPr/>
+        </p:nvPicPr>
+        <p:blipFill>
+          <a:blip r:embed="rId11"/>
+          <a:stretch>
+            <a:fillRect/>
+          </a:stretch>
+        </p:blipFill>
+        <p:spPr>
+          <a:xfrm>
+            <a:off x="22207114" y="5886381"/>
+            <a:ext cx="3965929" cy="1032962"/>
           </a:xfrm>
           <a:prstGeom prst="rect">
             <a:avLst/>
